--- a/slides/VLLM-PD-presentation.pptx
+++ b/slides/VLLM-PD-presentation.pptx
@@ -8394,7 +8394,7 @@
                           </a:solidFill>
                           <a:latin typeface="Aptos"/>
                         </a:rPr>
-                        <a:t>GPT-4o mini</a:t>
+                        <a:t>GPT-5.4 mini</a:t>
                       </a:r>
                     </a:p>
                   </a:txBody>
